--- a/data_structure/assets/pics_and_ppts/ch3/画图用.pptx
+++ b/data_structure/assets/pics_and_ppts/ch3/画图用.pptx
@@ -215,7 +215,7 @@
           <a:p>
             <a:fld id="{297B47FF-7EB1-4F91-B87B-E2336844DBB2}" type="datetimeFigureOut">
               <a:rPr lang="zh-CN" altLang="en-US" smtClean="0"/>
-              <a:t>2026/10/6</a:t>
+              <a:t>2026/10/8</a:t>
             </a:fld>
             <a:endParaRPr lang="zh-CN" altLang="en-US"/>
           </a:p>
@@ -713,7 +713,7 @@
           <a:p>
             <a:fld id="{3191862F-9637-4C18-92E6-D94FE035F95B}" type="datetimeFigureOut">
               <a:rPr lang="zh-CN" altLang="en-US" smtClean="0"/>
-              <a:t>2026/10/6</a:t>
+              <a:t>2026/10/8</a:t>
             </a:fld>
             <a:endParaRPr lang="zh-CN" altLang="en-US"/>
           </a:p>
@@ -911,7 +911,7 @@
           <a:p>
             <a:fld id="{3191862F-9637-4C18-92E6-D94FE035F95B}" type="datetimeFigureOut">
               <a:rPr lang="zh-CN" altLang="en-US" smtClean="0"/>
-              <a:t>2026/10/6</a:t>
+              <a:t>2026/10/8</a:t>
             </a:fld>
             <a:endParaRPr lang="zh-CN" altLang="en-US"/>
           </a:p>
@@ -1119,7 +1119,7 @@
           <a:p>
             <a:fld id="{3191862F-9637-4C18-92E6-D94FE035F95B}" type="datetimeFigureOut">
               <a:rPr lang="zh-CN" altLang="en-US" smtClean="0"/>
-              <a:t>2026/10/6</a:t>
+              <a:t>2026/10/8</a:t>
             </a:fld>
             <a:endParaRPr lang="zh-CN" altLang="en-US"/>
           </a:p>
@@ -1317,7 +1317,7 @@
           <a:p>
             <a:fld id="{3191862F-9637-4C18-92E6-D94FE035F95B}" type="datetimeFigureOut">
               <a:rPr lang="zh-CN" altLang="en-US" smtClean="0"/>
-              <a:t>2026/10/6</a:t>
+              <a:t>2026/10/8</a:t>
             </a:fld>
             <a:endParaRPr lang="zh-CN" altLang="en-US"/>
           </a:p>
@@ -1592,7 +1592,7 @@
           <a:p>
             <a:fld id="{3191862F-9637-4C18-92E6-D94FE035F95B}" type="datetimeFigureOut">
               <a:rPr lang="zh-CN" altLang="en-US" smtClean="0"/>
-              <a:t>2026/10/6</a:t>
+              <a:t>2026/10/8</a:t>
             </a:fld>
             <a:endParaRPr lang="zh-CN" altLang="en-US"/>
           </a:p>
@@ -1857,7 +1857,7 @@
           <a:p>
             <a:fld id="{3191862F-9637-4C18-92E6-D94FE035F95B}" type="datetimeFigureOut">
               <a:rPr lang="zh-CN" altLang="en-US" smtClean="0"/>
-              <a:t>2026/10/6</a:t>
+              <a:t>2026/10/8</a:t>
             </a:fld>
             <a:endParaRPr lang="zh-CN" altLang="en-US"/>
           </a:p>
@@ -2269,7 +2269,7 @@
           <a:p>
             <a:fld id="{3191862F-9637-4C18-92E6-D94FE035F95B}" type="datetimeFigureOut">
               <a:rPr lang="zh-CN" altLang="en-US" smtClean="0"/>
-              <a:t>2026/10/6</a:t>
+              <a:t>2026/10/8</a:t>
             </a:fld>
             <a:endParaRPr lang="zh-CN" altLang="en-US"/>
           </a:p>
@@ -2410,7 +2410,7 @@
           <a:p>
             <a:fld id="{3191862F-9637-4C18-92E6-D94FE035F95B}" type="datetimeFigureOut">
               <a:rPr lang="zh-CN" altLang="en-US" smtClean="0"/>
-              <a:t>2026/10/6</a:t>
+              <a:t>2026/10/8</a:t>
             </a:fld>
             <a:endParaRPr lang="zh-CN" altLang="en-US"/>
           </a:p>
@@ -2523,7 +2523,7 @@
           <a:p>
             <a:fld id="{3191862F-9637-4C18-92E6-D94FE035F95B}" type="datetimeFigureOut">
               <a:rPr lang="zh-CN" altLang="en-US" smtClean="0"/>
-              <a:t>2026/10/6</a:t>
+              <a:t>2026/10/8</a:t>
             </a:fld>
             <a:endParaRPr lang="zh-CN" altLang="en-US"/>
           </a:p>
@@ -2834,7 +2834,7 @@
           <a:p>
             <a:fld id="{3191862F-9637-4C18-92E6-D94FE035F95B}" type="datetimeFigureOut">
               <a:rPr lang="zh-CN" altLang="en-US" smtClean="0"/>
-              <a:t>2026/10/6</a:t>
+              <a:t>2026/10/8</a:t>
             </a:fld>
             <a:endParaRPr lang="zh-CN" altLang="en-US"/>
           </a:p>
@@ -3122,7 +3122,7 @@
           <a:p>
             <a:fld id="{3191862F-9637-4C18-92E6-D94FE035F95B}" type="datetimeFigureOut">
               <a:rPr lang="zh-CN" altLang="en-US" smtClean="0"/>
-              <a:t>2026/10/6</a:t>
+              <a:t>2026/10/8</a:t>
             </a:fld>
             <a:endParaRPr lang="zh-CN" altLang="en-US"/>
           </a:p>
@@ -3363,7 +3363,7 @@
           <a:p>
             <a:fld id="{3191862F-9637-4C18-92E6-D94FE035F95B}" type="datetimeFigureOut">
               <a:rPr lang="zh-CN" altLang="en-US" smtClean="0"/>
-              <a:t>2026/10/6</a:t>
+              <a:t>2026/10/8</a:t>
             </a:fld>
             <a:endParaRPr lang="zh-CN" altLang="en-US"/>
           </a:p>
@@ -15027,6 +15027,134 @@
           <a:chExt cx="0" cy="0"/>
         </a:xfrm>
       </p:grpSpPr>
+      <p:cxnSp>
+        <p:nvCxnSpPr>
+          <p:cNvPr id="2" name="直接连接符 1">
+            <a:extLst>
+              <a:ext uri="{FF2B5EF4-FFF2-40B4-BE49-F238E27FC236}">
+                <a16:creationId xmlns:a16="http://schemas.microsoft.com/office/drawing/2014/main" id="{B01554AA-643B-BA91-156C-4BBD5D56A8E5}"/>
+              </a:ext>
+            </a:extLst>
+          </p:cNvPr>
+          <p:cNvCxnSpPr>
+            <a:cxnSpLocks/>
+          </p:cNvCxnSpPr>
+          <p:nvPr/>
+        </p:nvCxnSpPr>
+        <p:spPr>
+          <a:xfrm>
+            <a:off x="2274739" y="1264619"/>
+            <a:ext cx="2734191" cy="0"/>
+          </a:xfrm>
+          <a:prstGeom prst="line">
+            <a:avLst/>
+          </a:prstGeom>
+        </p:spPr>
+        <p:style>
+          <a:lnRef idx="2">
+            <a:schemeClr val="dk1"/>
+          </a:lnRef>
+          <a:fillRef idx="0">
+            <a:schemeClr val="dk1"/>
+          </a:fillRef>
+          <a:effectRef idx="1">
+            <a:schemeClr val="dk1"/>
+          </a:effectRef>
+          <a:fontRef idx="minor">
+            <a:schemeClr val="tx1"/>
+          </a:fontRef>
+        </p:style>
+      </p:cxnSp>
+      <p:cxnSp>
+        <p:nvCxnSpPr>
+          <p:cNvPr id="3" name="直接连接符 2">
+            <a:extLst>
+              <a:ext uri="{FF2B5EF4-FFF2-40B4-BE49-F238E27FC236}">
+                <a16:creationId xmlns:a16="http://schemas.microsoft.com/office/drawing/2014/main" id="{9032456C-D6C9-E459-0601-A66EE41F2F1A}"/>
+              </a:ext>
+            </a:extLst>
+          </p:cNvPr>
+          <p:cNvCxnSpPr>
+            <a:cxnSpLocks/>
+          </p:cNvCxnSpPr>
+          <p:nvPr/>
+        </p:nvCxnSpPr>
+        <p:spPr>
+          <a:xfrm>
+            <a:off x="2274739" y="1953516"/>
+            <a:ext cx="2734191" cy="0"/>
+          </a:xfrm>
+          <a:prstGeom prst="line">
+            <a:avLst/>
+          </a:prstGeom>
+        </p:spPr>
+        <p:style>
+          <a:lnRef idx="2">
+            <a:schemeClr val="dk1"/>
+          </a:lnRef>
+          <a:fillRef idx="0">
+            <a:schemeClr val="dk1"/>
+          </a:fillRef>
+          <a:effectRef idx="1">
+            <a:schemeClr val="dk1"/>
+          </a:effectRef>
+          <a:fontRef idx="minor">
+            <a:schemeClr val="tx1"/>
+          </a:fontRef>
+        </p:style>
+      </p:cxnSp>
+      <p:sp>
+        <p:nvSpPr>
+          <p:cNvPr id="6" name="矩形: 圆角 5">
+            <a:extLst>
+              <a:ext uri="{FF2B5EF4-FFF2-40B4-BE49-F238E27FC236}">
+                <a16:creationId xmlns:a16="http://schemas.microsoft.com/office/drawing/2014/main" id="{6D8D6826-EDBD-2E84-611B-1C212A1F9E41}"/>
+              </a:ext>
+            </a:extLst>
+          </p:cNvPr>
+          <p:cNvSpPr/>
+          <p:nvPr/>
+        </p:nvSpPr>
+        <p:spPr>
+          <a:xfrm>
+            <a:off x="2360323" y="1264619"/>
+            <a:ext cx="457200" cy="688897"/>
+          </a:xfrm>
+          <a:prstGeom prst="roundRect">
+            <a:avLst/>
+          </a:prstGeom>
+        </p:spPr>
+        <p:style>
+          <a:lnRef idx="2">
+            <a:schemeClr val="dk1"/>
+          </a:lnRef>
+          <a:fillRef idx="1">
+            <a:schemeClr val="lt1"/>
+          </a:fillRef>
+          <a:effectRef idx="0">
+            <a:schemeClr val="dk1"/>
+          </a:effectRef>
+          <a:fontRef idx="minor">
+            <a:schemeClr val="dk1"/>
+          </a:fontRef>
+        </p:style>
+        <p:txBody>
+          <a:bodyPr rtlCol="0" anchor="ctr"/>
+          <a:lstStyle/>
+          <a:p>
+            <a:pPr algn="ctr"/>
+            <a:r>
+              <a:rPr lang="en-US" altLang="zh-CN"/>
+              <a:t>a</a:t>
+            </a:r>
+            <a:r>
+              <a:rPr lang="en-US" altLang="zh-CN" baseline="-25000"/>
+              <a:t>3</a:t>
+            </a:r>
+            <a:endParaRPr lang="zh-CN" altLang="en-US" baseline="-25000"/>
+          </a:p>
+        </p:txBody>
+      </p:sp>
     </p:spTree>
     <p:extLst>
       <p:ext uri="{BB962C8B-B14F-4D97-AF65-F5344CB8AC3E}">
